--- a/dist/초2/수학/자료와규칙/초2_수학_자료와규칙_02_표와그래프_학생용.pptx
+++ b/dist/초2/수학/자료와규칙/초2_수학_자료와규칙_02_표와그래프_학생용.pptx
@@ -120,13 +120,13 @@
   <p:extLst>
     <p:ext uri="{521415D9-36F7-43E2-AB2F-B90AF26B5E84}">
       <p14:sectionLst xmlns:p14="http://schemas.microsoft.com/office/powerpoint/2010/main">
-        <p14:section name="도입" id="{cb1f0e8a-fa5e-f00a-ec0d-7a407d47b693}">
+        <p14:section name="도입" id="{bd3f2124-63f8-cc94-7532-5b9424e81d44}">
           <p14:sldIdLst>
             <p14:sldId id="256"/>
             <p14:sldId id="257"/>
           </p14:sldIdLst>
         </p14:section>
-        <p14:section name="개념" id="{7b87e894-2d7c-bc43-dd04-91db31b953a2}">
+        <p14:section name="개념" id="{b920d64e-1524-4787-b1ca-04e3db688fb0}">
           <p14:sldIdLst>
             <p14:sldId id="258"/>
             <p14:sldId id="259"/>
@@ -134,7 +134,7 @@
             <p14:sldId id="261"/>
           </p14:sldIdLst>
         </p14:section>
-        <p14:section name="연습" id="{8b10c0cb-64b4-bd8f-7e0e-a2429fd7f24e}">
+        <p14:section name="연습" id="{c647725e-63a0-372a-e36e-df46fe46a953}">
           <p14:sldIdLst>
             <p14:sldId id="262"/>
             <p14:sldId id="263"/>
@@ -142,18 +142,18 @@
             <p14:sldId id="265"/>
           </p14:sldIdLst>
         </p14:section>
-        <p14:section name="확인" id="{9bd913f1-dcdb-d459-9fdb-0b865b267084}">
+        <p14:section name="확인" id="{eef302d6-0160-26f0-41a5-f8206a943e97}">
           <p14:sldIdLst>
             <p14:sldId id="266"/>
             <p14:sldId id="267"/>
           </p14:sldIdLst>
         </p14:section>
-        <p14:section name="정리" id="{de780b0f-4986-27cf-bb87-1ed5f768038c}">
+        <p14:section name="정리" id="{30d563e3-95e9-3709-26e3-cdc9f4b86b11}">
           <p14:sldIdLst>
             <p14:sldId id="268"/>
           </p14:sldIdLst>
         </p14:section>
-        <p14:section name="보충" id="{4efce1bf-73b4-4a5e-4956-7bf2257fb34e}">
+        <p14:section name="보충" id="{c58c73bd-d5ed-04d0-1d20-9faf8cc7b96a}">
           <p14:sldIdLst>
             <p14:sldId id="269"/>
           </p14:sldIdLst>
@@ -8260,7 +8260,7 @@
         </p:nvSpPr>
         <p:spPr>
           <a:xfrm>
-            <a:off x="548640" y="2459736"/>
+            <a:off x="548640" y="2734056"/>
             <a:ext cx="566928" cy="566928"/>
           </a:xfrm>
           <a:prstGeom prst="roundRect">
@@ -8307,12 +8307,12 @@
         </p:nvSpPr>
         <p:spPr>
           <a:xfrm>
-            <a:off x="1344168" y="2476500"/>
-            <a:ext cx="533400" cy="533400"/>
+            <a:off x="1344168" y="2644140"/>
+            <a:ext cx="746760" cy="746760"/>
           </a:xfrm>
           <a:prstGeom prst="roundRect">
             <a:avLst>
-              <a:gd name="adj" fmla="val 24000"/>
+              <a:gd name="adj" fmla="val 17143"/>
             </a:avLst>
           </a:prstGeom>
           <a:solidFill>
@@ -8332,7 +8332,7 @@
               <a:buNone/>
             </a:pPr>
             <a:r>
-              <a:rPr lang="ko-KR" altLang="en-US" sz="2300" b="1" dirty="0">
+              <a:rPr lang="ko-KR" altLang="en-US" sz="3200" b="1" dirty="0">
                 <a:solidFill>
                   <a:srgbClr val="1F2937"/>
                 </a:solidFill>
@@ -8342,7 +8342,7 @@
               </a:rPr>
               <a:t>●</a:t>
             </a:r>
-            <a:endParaRPr lang="ko-KR" sz="2300" dirty="0"/>
+            <a:endParaRPr lang="ko-KR" sz="3200" dirty="0"/>
           </a:p>
         </p:txBody>
       </p:sp>
@@ -8354,12 +8354,12 @@
         </p:nvSpPr>
         <p:spPr>
           <a:xfrm>
-            <a:off x="2078736" y="2476500"/>
-            <a:ext cx="533400" cy="533400"/>
+            <a:off x="2292096" y="2644140"/>
+            <a:ext cx="746760" cy="746760"/>
           </a:xfrm>
           <a:prstGeom prst="roundRect">
             <a:avLst>
-              <a:gd name="adj" fmla="val 24000"/>
+              <a:gd name="adj" fmla="val 17143"/>
             </a:avLst>
           </a:prstGeom>
           <a:solidFill>
@@ -8379,7 +8379,7 @@
               <a:buNone/>
             </a:pPr>
             <a:r>
-              <a:rPr lang="ko-KR" altLang="en-US" sz="2300" b="1" dirty="0">
+              <a:rPr lang="ko-KR" altLang="en-US" sz="3200" b="1" dirty="0">
                 <a:solidFill>
                   <a:srgbClr val="1F2937"/>
                 </a:solidFill>
@@ -8389,7 +8389,7 @@
               </a:rPr>
               <a:t>▲</a:t>
             </a:r>
-            <a:endParaRPr lang="ko-KR" sz="2300" dirty="0"/>
+            <a:endParaRPr lang="ko-KR" sz="3200" dirty="0"/>
           </a:p>
         </p:txBody>
       </p:sp>
@@ -8401,12 +8401,12 @@
         </p:nvSpPr>
         <p:spPr>
           <a:xfrm>
-            <a:off x="2813304" y="2476500"/>
-            <a:ext cx="533400" cy="533400"/>
+            <a:off x="3240024" y="2644140"/>
+            <a:ext cx="746760" cy="746760"/>
           </a:xfrm>
           <a:prstGeom prst="roundRect">
             <a:avLst>
-              <a:gd name="adj" fmla="val 24000"/>
+              <a:gd name="adj" fmla="val 17143"/>
             </a:avLst>
           </a:prstGeom>
           <a:solidFill>
@@ -8426,7 +8426,7 @@
               <a:buNone/>
             </a:pPr>
             <a:r>
-              <a:rPr lang="ko-KR" altLang="en-US" sz="2300" b="1" dirty="0">
+              <a:rPr lang="ko-KR" altLang="en-US" sz="3200" b="1" dirty="0">
                 <a:solidFill>
                   <a:srgbClr val="1F2937"/>
                 </a:solidFill>
@@ -8436,7 +8436,7 @@
               </a:rPr>
               <a:t>●</a:t>
             </a:r>
-            <a:endParaRPr lang="ko-KR" sz="2300" dirty="0"/>
+            <a:endParaRPr lang="ko-KR" sz="3200" dirty="0"/>
           </a:p>
         </p:txBody>
       </p:sp>
@@ -8448,12 +8448,12 @@
         </p:nvSpPr>
         <p:spPr>
           <a:xfrm>
-            <a:off x="3547872" y="2476500"/>
-            <a:ext cx="533400" cy="533400"/>
+            <a:off x="4187952" y="2644140"/>
+            <a:ext cx="746760" cy="746760"/>
           </a:xfrm>
           <a:prstGeom prst="roundRect">
             <a:avLst>
-              <a:gd name="adj" fmla="val 24000"/>
+              <a:gd name="adj" fmla="val 17143"/>
             </a:avLst>
           </a:prstGeom>
           <a:solidFill>
@@ -8473,7 +8473,7 @@
               <a:buNone/>
             </a:pPr>
             <a:r>
-              <a:rPr lang="ko-KR" altLang="en-US" sz="2300" b="1" dirty="0">
+              <a:rPr lang="ko-KR" altLang="en-US" sz="3200" b="1" dirty="0">
                 <a:solidFill>
                   <a:srgbClr val="1F2937"/>
                 </a:solidFill>
@@ -8483,7 +8483,7 @@
               </a:rPr>
               <a:t>■</a:t>
             </a:r>
-            <a:endParaRPr lang="ko-KR" sz="2300" dirty="0"/>
+            <a:endParaRPr lang="ko-KR" sz="3200" dirty="0"/>
           </a:p>
         </p:txBody>
       </p:sp>
@@ -8495,12 +8495,12 @@
         </p:nvSpPr>
         <p:spPr>
           <a:xfrm>
-            <a:off x="4282440" y="2476500"/>
-            <a:ext cx="533400" cy="533400"/>
+            <a:off x="5135880" y="2644140"/>
+            <a:ext cx="746760" cy="746760"/>
           </a:xfrm>
           <a:prstGeom prst="roundRect">
             <a:avLst>
-              <a:gd name="adj" fmla="val 24000"/>
+              <a:gd name="adj" fmla="val 17143"/>
             </a:avLst>
           </a:prstGeom>
           <a:solidFill>
@@ -8520,7 +8520,7 @@
               <a:buNone/>
             </a:pPr>
             <a:r>
-              <a:rPr lang="ko-KR" altLang="en-US" sz="2300" b="1" dirty="0">
+              <a:rPr lang="ko-KR" altLang="en-US" sz="3200" b="1" dirty="0">
                 <a:solidFill>
                   <a:srgbClr val="1F2937"/>
                 </a:solidFill>
@@ -8530,7 +8530,7 @@
               </a:rPr>
               <a:t>●</a:t>
             </a:r>
-            <a:endParaRPr lang="ko-KR" sz="2300" dirty="0"/>
+            <a:endParaRPr lang="ko-KR" sz="3200" dirty="0"/>
           </a:p>
         </p:txBody>
       </p:sp>
@@ -8542,12 +8542,12 @@
         </p:nvSpPr>
         <p:spPr>
           <a:xfrm>
-            <a:off x="5017008" y="2476500"/>
-            <a:ext cx="533400" cy="533400"/>
+            <a:off x="6083808" y="2644140"/>
+            <a:ext cx="746760" cy="746760"/>
           </a:xfrm>
           <a:prstGeom prst="roundRect">
             <a:avLst>
-              <a:gd name="adj" fmla="val 24000"/>
+              <a:gd name="adj" fmla="val 17143"/>
             </a:avLst>
           </a:prstGeom>
           <a:solidFill>
@@ -8567,7 +8567,7 @@
               <a:buNone/>
             </a:pPr>
             <a:r>
-              <a:rPr lang="ko-KR" altLang="en-US" sz="2300" b="1" dirty="0">
+              <a:rPr lang="ko-KR" altLang="en-US" sz="3200" b="1" dirty="0">
                 <a:solidFill>
                   <a:srgbClr val="1F2937"/>
                 </a:solidFill>
@@ -8577,7 +8577,7 @@
               </a:rPr>
               <a:t>▲</a:t>
             </a:r>
-            <a:endParaRPr lang="ko-KR" sz="2300" dirty="0"/>
+            <a:endParaRPr lang="ko-KR" sz="3200" dirty="0"/>
           </a:p>
         </p:txBody>
       </p:sp>

--- a/dist/초2/수학/자료와규칙/초2_수학_자료와규칙_02_표와그래프_학생용.pptx
+++ b/dist/초2/수학/자료와규칙/초2_수학_자료와규칙_02_표와그래프_학생용.pptx
@@ -120,13 +120,13 @@
   <p:extLst>
     <p:ext uri="{521415D9-36F7-43E2-AB2F-B90AF26B5E84}">
       <p14:sectionLst xmlns:p14="http://schemas.microsoft.com/office/powerpoint/2010/main">
-        <p14:section name="도입" id="{bd3f2124-63f8-cc94-7532-5b9424e81d44}">
+        <p14:section name="도입" id="{7a38672d-d77c-774c-4293-8b88794f440d}">
           <p14:sldIdLst>
             <p14:sldId id="256"/>
             <p14:sldId id="257"/>
           </p14:sldIdLst>
         </p14:section>
-        <p14:section name="개념" id="{b920d64e-1524-4787-b1ca-04e3db688fb0}">
+        <p14:section name="개념" id="{7e3a75b2-9207-2428-88a0-008af4d08495}">
           <p14:sldIdLst>
             <p14:sldId id="258"/>
             <p14:sldId id="259"/>
@@ -134,7 +134,7 @@
             <p14:sldId id="261"/>
           </p14:sldIdLst>
         </p14:section>
-        <p14:section name="연습" id="{c647725e-63a0-372a-e36e-df46fe46a953}">
+        <p14:section name="연습" id="{b459bd0c-c31a-339a-3bf0-28a0a29b183c}">
           <p14:sldIdLst>
             <p14:sldId id="262"/>
             <p14:sldId id="263"/>
@@ -142,18 +142,18 @@
             <p14:sldId id="265"/>
           </p14:sldIdLst>
         </p14:section>
-        <p14:section name="확인" id="{eef302d6-0160-26f0-41a5-f8206a943e97}">
+        <p14:section name="확인" id="{ede21ef3-1533-fdc0-7396-e3e6f9e61e0e}">
           <p14:sldIdLst>
             <p14:sldId id="266"/>
             <p14:sldId id="267"/>
           </p14:sldIdLst>
         </p14:section>
-        <p14:section name="정리" id="{30d563e3-95e9-3709-26e3-cdc9f4b86b11}">
+        <p14:section name="정리" id="{7e5edc66-d038-7160-174b-1b398cca0a48}">
           <p14:sldIdLst>
             <p14:sldId id="268"/>
           </p14:sldIdLst>
         </p14:section>
-        <p14:section name="보충" id="{c58c73bd-d5ed-04d0-1d20-9faf8cc7b96a}">
+        <p14:section name="보충" id="{7683e418-6c2d-5e7d-0e6e-74c4302529ad}">
           <p14:sldIdLst>
             <p14:sldId id="269"/>
           </p14:sldIdLst>
@@ -5522,7 +5522,7 @@
           </p:nvPr>
         </p:nvGraphicFramePr>
         <p:xfrm>
-          <a:off x="6254496" y="3037840"/>
+          <a:off x="6254496" y="3054350"/>
           <a:ext cx="5385816" cy="914400"/>
         </p:xfrm>
         <a:graphic>
@@ -5536,7 +5536,7 @@
                 <a:gridCol w="969447"/>
                 <a:gridCol w="969447"/>
               </a:tblGrid>
-              <a:tr h="528320">
+              <a:tr h="511810">
                 <a:tc>
                   <a:txBody>
                     <a:bodyPr/>
@@ -5878,7 +5878,7 @@
                   </a:tcPr>
                 </a:tc>
               </a:tr>
-              <a:tr h="528320">
+              <a:tr h="511810">
                 <a:tc>
                   <a:txBody>
                     <a:bodyPr/>
@@ -7242,11 +7242,11 @@
         <p:spPr>
           <a:xfrm>
             <a:off x="548640" y="1325880"/>
-            <a:ext cx="11091672" cy="868680"/>
+            <a:ext cx="11091672" cy="1320800"/>
           </a:xfrm>
           <a:prstGeom prst="roundRect">
             <a:avLst>
-              <a:gd name="adj" fmla="val 12632"/>
+              <a:gd name="adj" fmla="val 8308"/>
             </a:avLst>
           </a:prstGeom>
           <a:solidFill>
@@ -7269,7 +7269,7 @@
         <p:spPr>
           <a:xfrm>
             <a:off x="822960" y="1463040"/>
-            <a:ext cx="10543032" cy="594360"/>
+            <a:ext cx="10543032" cy="1046480"/>
           </a:xfrm>
           <a:prstGeom prst="rect">
             <a:avLst/>
@@ -7310,7 +7310,7 @@
         </p:nvSpPr>
         <p:spPr>
           <a:xfrm>
-            <a:off x="548640" y="2423160"/>
+            <a:off x="548640" y="2875280"/>
             <a:ext cx="5431536" cy="594360"/>
           </a:xfrm>
           <a:prstGeom prst="roundRect">
@@ -7357,7 +7357,7 @@
         </p:nvSpPr>
         <p:spPr>
           <a:xfrm>
-            <a:off x="6208776" y="2423160"/>
+            <a:off x="6208776" y="2875280"/>
             <a:ext cx="5431536" cy="594360"/>
           </a:xfrm>
           <a:prstGeom prst="roundRect">
@@ -7404,7 +7404,7 @@
         </p:nvSpPr>
         <p:spPr>
           <a:xfrm>
-            <a:off x="548640" y="3246120"/>
+            <a:off x="548640" y="3698240"/>
             <a:ext cx="11091672" cy="457200"/>
           </a:xfrm>
           <a:prstGeom prst="rect">
@@ -7443,8 +7443,8 @@
         </p:nvSpPr>
         <p:spPr>
           <a:xfrm>
-            <a:off x="548640" y="3749040"/>
-            <a:ext cx="3544824" cy="1828800"/>
+            <a:off x="548640" y="4201160"/>
+            <a:ext cx="3544824" cy="1376680"/>
           </a:xfrm>
           <a:prstGeom prst="rect">
             <a:avLst/>
@@ -7499,8 +7499,8 @@
         </p:nvSpPr>
         <p:spPr>
           <a:xfrm>
-            <a:off x="4322064" y="3749040"/>
-            <a:ext cx="3544824" cy="1828800"/>
+            <a:off x="4322064" y="4201160"/>
+            <a:ext cx="3544824" cy="1376680"/>
           </a:xfrm>
           <a:prstGeom prst="rect">
             <a:avLst/>
@@ -7555,8 +7555,8 @@
         </p:nvSpPr>
         <p:spPr>
           <a:xfrm>
-            <a:off x="8095488" y="3749040"/>
-            <a:ext cx="3544824" cy="1828800"/>
+            <a:off x="8095488" y="4201160"/>
+            <a:ext cx="3544824" cy="1376680"/>
           </a:xfrm>
           <a:prstGeom prst="rect">
             <a:avLst/>
@@ -9804,7 +9804,7 @@
           </p:nvPr>
         </p:nvGraphicFramePr>
         <p:xfrm>
-          <a:off x="1156716" y="2820162"/>
+          <a:off x="1156716" y="2836672"/>
           <a:ext cx="9875520" cy="914400"/>
         </p:xfrm>
         <a:graphic>
@@ -9819,7 +9819,7 @@
                 <a:gridCol w="1422075"/>
                 <a:gridCol w="1422075"/>
               </a:tblGrid>
-              <a:tr h="528320">
+              <a:tr h="511810">
                 <a:tc>
                   <a:txBody>
                     <a:bodyPr/>
@@ -10229,7 +10229,7 @@
                   </a:tcPr>
                 </a:tc>
               </a:tr>
-              <a:tr h="528320">
+              <a:tr h="511810">
                 <a:tc>
                   <a:txBody>
                     <a:bodyPr/>
@@ -13898,7 +13898,7 @@
           </p:nvPr>
         </p:nvGraphicFramePr>
         <p:xfrm>
-          <a:off x="6254496" y="3037840"/>
+          <a:off x="6254496" y="3054350"/>
           <a:ext cx="5385816" cy="914400"/>
         </p:xfrm>
         <a:graphic>
@@ -13912,7 +13912,7 @@
                 <a:gridCol w="969447"/>
                 <a:gridCol w="969447"/>
               </a:tblGrid>
-              <a:tr h="528320">
+              <a:tr h="511810">
                 <a:tc>
                   <a:txBody>
                     <a:bodyPr/>
@@ -14254,7 +14254,7 @@
                   </a:tcPr>
                 </a:tc>
               </a:tr>
-              <a:tr h="528320">
+              <a:tr h="511810">
                 <a:tc>
                   <a:txBody>
                     <a:bodyPr/>
